--- a/Career Compass for Student Dreams.pptx
+++ b/Career Compass for Student Dreams.pptx
@@ -23,8 +23,8 @@
     <p:sldId id="344" r:id="rId11"/>
     <p:sldId id="345" r:id="rId12"/>
     <p:sldId id="346" r:id="rId13"/>
-    <p:sldId id="340" r:id="rId14"/>
-    <p:sldId id="349" r:id="rId15"/>
+    <p:sldId id="349" r:id="rId14"/>
+    <p:sldId id="340" r:id="rId15"/>
     <p:sldId id="347" r:id="rId16"/>
     <p:sldId id="348" r:id="rId17"/>
     <p:sldId id="332" r:id="rId18"/>
@@ -239,7 +239,7 @@
           <a:p>
             <a:fld id="{469F6064-4237-BA4C-A655-B64A9E0DF723}" type="datetimeFigureOut">
               <a:rPr lang="en-US" smtClean="0"/>
-              <a:t>3/10/2026</a:t>
+              <a:t>3/11/2026</a:t>
             </a:fld>
             <a:endParaRPr lang="en-US"/>
           </a:p>
@@ -446,7 +446,7 @@
           <a:p>
             <a:fld id="{85A854B6-73EE-3647-B9F0-9FDDAF047BDA}" type="datetimeFigureOut">
               <a:rPr lang="en-US" smtClean="0"/>
-              <a:t>3/10/2026</a:t>
+              <a:t>3/11/2026</a:t>
             </a:fld>
             <a:endParaRPr lang="en-US"/>
           </a:p>
@@ -863,7 +863,7 @@
           <a:p>
             <a:fld id="{3BF734CB-DFAB-944A-8037-9643745D8F20}" type="datetime1">
               <a:rPr lang="en-IN" smtClean="0"/>
-              <a:t>10-03-2026</a:t>
+              <a:t>11-03-2026</a:t>
             </a:fld>
             <a:endParaRPr lang="en-US"/>
           </a:p>
@@ -1066,7 +1066,7 @@
           <a:p>
             <a:fld id="{B04444B0-6575-954F-AAA2-CB0D0417F745}" type="datetime1">
               <a:rPr lang="en-IN" smtClean="0"/>
-              <a:t>10-03-2026</a:t>
+              <a:t>11-03-2026</a:t>
             </a:fld>
             <a:endParaRPr lang="en-US"/>
           </a:p>
@@ -1279,7 +1279,7 @@
           <a:p>
             <a:fld id="{6DE7A436-9AA5-6C4B-AFF1-C34F60A9AB89}" type="datetime1">
               <a:rPr lang="en-IN" smtClean="0"/>
-              <a:t>10-03-2026</a:t>
+              <a:t>11-03-2026</a:t>
             </a:fld>
             <a:endParaRPr lang="en-US"/>
           </a:p>
@@ -1504,7 +1504,7 @@
           <a:p>
             <a:fld id="{6BF141C7-EF5A-1D4A-89F0-79C7DE818D53}" type="datetime1">
               <a:rPr lang="en-IN" smtClean="0"/>
-              <a:t>10-03-2026</a:t>
+              <a:t>11-03-2026</a:t>
             </a:fld>
             <a:endParaRPr lang="en-US"/>
           </a:p>
@@ -1707,7 +1707,7 @@
           <a:p>
             <a:fld id="{8C868A0C-C998-984C-ABE3-A33473D7CABD}" type="datetime1">
               <a:rPr lang="en-IN" smtClean="0"/>
-              <a:t>10-03-2026</a:t>
+              <a:t>11-03-2026</a:t>
             </a:fld>
             <a:endParaRPr lang="en-US"/>
           </a:p>
@@ -1986,7 +1986,7 @@
           <a:p>
             <a:fld id="{BDD2EF84-6667-8447-AC88-082F9D71D82C}" type="datetime1">
               <a:rPr lang="en-IN" smtClean="0"/>
-              <a:t>10-03-2026</a:t>
+              <a:t>11-03-2026</a:t>
             </a:fld>
             <a:endParaRPr lang="en-US"/>
           </a:p>
@@ -2257,7 +2257,7 @@
           <a:p>
             <a:fld id="{61563FD6-5C64-304A-9680-469E8D83D1BF}" type="datetime1">
               <a:rPr lang="en-IN" smtClean="0"/>
-              <a:t>10-03-2026</a:t>
+              <a:t>11-03-2026</a:t>
             </a:fld>
             <a:endParaRPr lang="en-US"/>
           </a:p>
@@ -2675,7 +2675,7 @@
           <a:p>
             <a:fld id="{D93985EC-8C41-0649-B43C-28421C497AA5}" type="datetime1">
               <a:rPr lang="en-IN" smtClean="0"/>
-              <a:t>10-03-2026</a:t>
+              <a:t>11-03-2026</a:t>
             </a:fld>
             <a:endParaRPr lang="en-US"/>
           </a:p>
@@ -2878,7 +2878,7 @@
           <a:p>
             <a:fld id="{9C5272DB-0103-AF4C-A22D-07421EC406AD}" type="datetime1">
               <a:rPr lang="en-IN" smtClean="0"/>
-              <a:t>10-03-2026</a:t>
+              <a:t>11-03-2026</a:t>
             </a:fld>
             <a:endParaRPr lang="en-US"/>
           </a:p>
@@ -3215,7 +3215,7 @@
           <a:p>
             <a:fld id="{6918335F-2E5B-B14E-9706-E237C81E4155}" type="datetime1">
               <a:rPr lang="en-IN" smtClean="0"/>
-              <a:t>10-03-2026</a:t>
+              <a:t>11-03-2026</a:t>
             </a:fld>
             <a:endParaRPr lang="en-US"/>
           </a:p>
@@ -3486,7 +3486,7 @@
           <a:p>
             <a:fld id="{15BD6649-7156-A341-B9F2-F045B7551E13}" type="datetime1">
               <a:rPr lang="en-IN" smtClean="0"/>
-              <a:t>10-03-2026</a:t>
+              <a:t>11-03-2026</a:t>
             </a:fld>
             <a:endParaRPr lang="en-US"/>
           </a:p>
@@ -3904,7 +3904,7 @@
           <a:p>
             <a:fld id="{C9977CD1-E97C-BA41-8E49-9F39B98FFBE8}" type="datetime1">
               <a:rPr lang="en-IN" smtClean="0"/>
-              <a:t>10-03-2026</a:t>
+              <a:t>11-03-2026</a:t>
             </a:fld>
             <a:endParaRPr lang="en-US"/>
           </a:p>
@@ -4049,7 +4049,7 @@
           <a:p>
             <a:fld id="{F3DDBCA1-9406-7A44-8A76-1046B4040777}" type="datetime1">
               <a:rPr lang="en-IN" smtClean="0"/>
-              <a:t>10-03-2026</a:t>
+              <a:t>11-03-2026</a:t>
             </a:fld>
             <a:endParaRPr lang="en-US"/>
           </a:p>
@@ -4165,7 +4165,7 @@
           <a:p>
             <a:fld id="{C7FB085D-B69B-9C45-93A5-77F47F2F6792}" type="datetime1">
               <a:rPr lang="en-IN" smtClean="0"/>
-              <a:t>10-03-2026</a:t>
+              <a:t>11-03-2026</a:t>
             </a:fld>
             <a:endParaRPr lang="en-US"/>
           </a:p>
@@ -4481,7 +4481,7 @@
           <a:p>
             <a:fld id="{C61B69B7-E8EF-6346-9390-671C5B22ACF3}" type="datetime1">
               <a:rPr lang="en-IN" smtClean="0"/>
-              <a:t>10-03-2026</a:t>
+              <a:t>11-03-2026</a:t>
             </a:fld>
             <a:endParaRPr lang="en-US"/>
           </a:p>
@@ -4773,7 +4773,7 @@
           <a:p>
             <a:fld id="{B920709D-BF3C-5743-B60D-B01C16014A7B}" type="datetime1">
               <a:rPr lang="en-IN" smtClean="0"/>
-              <a:t>10-03-2026</a:t>
+              <a:t>11-03-2026</a:t>
             </a:fld>
             <a:endParaRPr lang="en-US"/>
           </a:p>
@@ -5019,7 +5019,7 @@
           <a:p>
             <a:fld id="{2885D85A-3465-384D-962A-D11BB8B39525}" type="datetime1">
               <a:rPr lang="en-IN" smtClean="0"/>
-              <a:t>10-03-2026</a:t>
+              <a:t>11-03-2026</a:t>
             </a:fld>
             <a:endParaRPr lang="en-US"/>
           </a:p>
@@ -5593,7 +5593,7 @@
           <a:p>
             <a:fld id="{29F4C6E9-161C-B44B-AD70-8813DADCDED1}" type="datetime1">
               <a:rPr lang="en-IN" smtClean="0"/>
-              <a:t>10-03-2026</a:t>
+              <a:t>11-03-2026</a:t>
             </a:fld>
             <a:endParaRPr lang="en-US"/>
           </a:p>
@@ -6171,7 +6171,7 @@
           <a:p>
             <a:fld id="{9ADE338F-74DD-D142-8C58-9E4C5E66F6E8}" type="datetime1">
               <a:rPr lang="en-IN" smtClean="0"/>
-              <a:t>10-03-2026</a:t>
+              <a:t>11-03-2026</a:t>
             </a:fld>
             <a:endParaRPr lang="en-US"/>
           </a:p>
@@ -6414,7 +6414,7 @@
           <a:p>
             <a:fld id="{20A639D7-EAE1-7C4A-AC63-30DD6B16DE20}" type="datetime1">
               <a:rPr lang="en-IN" smtClean="0"/>
-              <a:t>10-03-2026</a:t>
+              <a:t>11-03-2026</a:t>
             </a:fld>
             <a:endParaRPr lang="en-US"/>
           </a:p>
@@ -6684,7 +6684,7 @@
           <a:p>
             <a:fld id="{20A639D7-EAE1-7C4A-AC63-30DD6B16DE20}" type="datetime1">
               <a:rPr lang="en-IN" smtClean="0"/>
-              <a:t>10-03-2026</a:t>
+              <a:t>11-03-2026</a:t>
             </a:fld>
             <a:endParaRPr lang="en-US"/>
           </a:p>
@@ -6761,240 +6761,6 @@
 </file>
 
 <file path=ppt/slides/slide12.xml><?xml version="1.0" encoding="utf-8"?>
-<p:sld xmlns:a="http://schemas.openxmlformats.org/drawingml/2006/main" xmlns:r="http://schemas.openxmlformats.org/officeDocument/2006/relationships" xmlns:p="http://schemas.openxmlformats.org/presentationml/2006/main">
-  <p:cSld>
-    <p:spTree>
-      <p:nvGrpSpPr>
-        <p:cNvPr id="1" name=""/>
-        <p:cNvGrpSpPr/>
-        <p:nvPr/>
-      </p:nvGrpSpPr>
-      <p:grpSpPr>
-        <a:xfrm>
-          <a:off x="0" y="0"/>
-          <a:ext cx="0" cy="0"/>
-          <a:chOff x="0" y="0"/>
-          <a:chExt cx="0" cy="0"/>
-        </a:xfrm>
-      </p:grpSpPr>
-      <p:sp>
-        <p:nvSpPr>
-          <p:cNvPr id="2" name="Title 1">
-            <a:extLst>
-              <a:ext uri="{FF2B5EF4-FFF2-40B4-BE49-F238E27FC236}">
-                <a16:creationId xmlns:a16="http://schemas.microsoft.com/office/drawing/2014/main" id="{37323D68-D41B-9825-3931-B79590C795F8}"/>
-              </a:ext>
-            </a:extLst>
-          </p:cNvPr>
-          <p:cNvSpPr>
-            <a:spLocks noGrp="1"/>
-          </p:cNvSpPr>
-          <p:nvPr>
-            <p:ph type="title"/>
-          </p:nvPr>
-        </p:nvSpPr>
-        <p:spPr/>
-        <p:txBody>
-          <a:bodyPr/>
-          <a:lstStyle/>
-          <a:p>
-            <a:r>
-              <a:rPr lang="en-US" dirty="0"/>
-              <a:t>Screenshots for FWD &amp; DSA</a:t>
-            </a:r>
-          </a:p>
-        </p:txBody>
-      </p:sp>
-      <p:sp>
-        <p:nvSpPr>
-          <p:cNvPr id="4" name="Date Placeholder 3">
-            <a:extLst>
-              <a:ext uri="{FF2B5EF4-FFF2-40B4-BE49-F238E27FC236}">
-                <a16:creationId xmlns:a16="http://schemas.microsoft.com/office/drawing/2014/main" id="{F1963D1B-E2DB-29C3-BA63-FF21B16E3D52}"/>
-              </a:ext>
-            </a:extLst>
-          </p:cNvPr>
-          <p:cNvSpPr>
-            <a:spLocks noGrp="1"/>
-          </p:cNvSpPr>
-          <p:nvPr>
-            <p:ph type="dt" sz="half" idx="10"/>
-          </p:nvPr>
-        </p:nvSpPr>
-        <p:spPr/>
-        <p:txBody>
-          <a:bodyPr/>
-          <a:lstStyle/>
-          <a:p>
-            <a:fld id="{9C5272DB-0103-AF4C-A22D-07421EC406AD}" type="datetime1">
-              <a:rPr lang="en-IN" smtClean="0"/>
-              <a:t>10-03-2026</a:t>
-            </a:fld>
-            <a:endParaRPr lang="en-US"/>
-          </a:p>
-        </p:txBody>
-      </p:sp>
-      <p:sp>
-        <p:nvSpPr>
-          <p:cNvPr id="5" name="Footer Placeholder 4">
-            <a:extLst>
-              <a:ext uri="{FF2B5EF4-FFF2-40B4-BE49-F238E27FC236}">
-                <a16:creationId xmlns:a16="http://schemas.microsoft.com/office/drawing/2014/main" id="{49114CB5-AB44-10F9-E8AF-4658C65956F4}"/>
-              </a:ext>
-            </a:extLst>
-          </p:cNvPr>
-          <p:cNvSpPr>
-            <a:spLocks noGrp="1"/>
-          </p:cNvSpPr>
-          <p:nvPr>
-            <p:ph type="ftr" sz="quarter" idx="11"/>
-          </p:nvPr>
-        </p:nvSpPr>
-        <p:spPr/>
-        <p:txBody>
-          <a:bodyPr/>
-          <a:lstStyle/>
-          <a:p>
-            <a:r>
-              <a:rPr lang="en-US" dirty="0"/>
-              <a:t>173030211           Department of CSE</a:t>
-            </a:r>
-          </a:p>
-        </p:txBody>
-      </p:sp>
-      <p:sp>
-        <p:nvSpPr>
-          <p:cNvPr id="6" name="Slide Number Placeholder 5">
-            <a:extLst>
-              <a:ext uri="{FF2B5EF4-FFF2-40B4-BE49-F238E27FC236}">
-                <a16:creationId xmlns:a16="http://schemas.microsoft.com/office/drawing/2014/main" id="{198D5113-7B1F-AF02-CDA9-5B3AB95BE716}"/>
-              </a:ext>
-            </a:extLst>
-          </p:cNvPr>
-          <p:cNvSpPr>
-            <a:spLocks noGrp="1"/>
-          </p:cNvSpPr>
-          <p:nvPr>
-            <p:ph type="sldNum" sz="quarter" idx="12"/>
-          </p:nvPr>
-        </p:nvSpPr>
-        <p:spPr/>
-        <p:txBody>
-          <a:bodyPr/>
-          <a:lstStyle/>
-          <a:p>
-            <a:fld id="{B961B71F-4B40-8942-BB88-E0F5C0B46E10}" type="slidenum">
-              <a:rPr lang="en-US" smtClean="0"/>
-              <a:t>12</a:t>
-            </a:fld>
-            <a:endParaRPr lang="en-US"/>
-          </a:p>
-        </p:txBody>
-      </p:sp>
-      <p:pic>
-        <p:nvPicPr>
-          <p:cNvPr id="20" name="Picture 19">
-            <a:extLst>
-              <a:ext uri="{FF2B5EF4-FFF2-40B4-BE49-F238E27FC236}">
-                <a16:creationId xmlns:a16="http://schemas.microsoft.com/office/drawing/2014/main" id="{3B5B11AB-C8F8-6175-9313-2C20F7780C13}"/>
-              </a:ext>
-            </a:extLst>
-          </p:cNvPr>
-          <p:cNvPicPr>
-            <a:picLocks noChangeAspect="1"/>
-          </p:cNvPicPr>
-          <p:nvPr/>
-        </p:nvPicPr>
-        <p:blipFill>
-          <a:blip r:embed="rId2"/>
-          <a:stretch>
-            <a:fillRect/>
-          </a:stretch>
-        </p:blipFill>
-        <p:spPr>
-          <a:xfrm>
-            <a:off x="6617373" y="2724766"/>
-            <a:ext cx="5530166" cy="2553056"/>
-          </a:xfrm>
-          <a:prstGeom prst="rect">
-            <a:avLst/>
-          </a:prstGeom>
-        </p:spPr>
-      </p:pic>
-      <p:pic>
-        <p:nvPicPr>
-          <p:cNvPr id="32" name="Picture 31">
-            <a:extLst>
-              <a:ext uri="{FF2B5EF4-FFF2-40B4-BE49-F238E27FC236}">
-                <a16:creationId xmlns:a16="http://schemas.microsoft.com/office/drawing/2014/main" id="{A5DF1F9E-EAA6-FA5E-2217-51AE39082FFA}"/>
-              </a:ext>
-            </a:extLst>
-          </p:cNvPr>
-          <p:cNvPicPr>
-            <a:picLocks noChangeAspect="1"/>
-          </p:cNvPicPr>
-          <p:nvPr/>
-        </p:nvPicPr>
-        <p:blipFill>
-          <a:blip r:embed="rId3"/>
-          <a:stretch>
-            <a:fillRect/>
-          </a:stretch>
-        </p:blipFill>
-        <p:spPr>
-          <a:xfrm>
-            <a:off x="604010" y="4170929"/>
-            <a:ext cx="4667901" cy="2257740"/>
-          </a:xfrm>
-          <a:prstGeom prst="rect">
-            <a:avLst/>
-          </a:prstGeom>
-        </p:spPr>
-      </p:pic>
-      <p:pic>
-        <p:nvPicPr>
-          <p:cNvPr id="34" name="Picture 33">
-            <a:extLst>
-              <a:ext uri="{FF2B5EF4-FFF2-40B4-BE49-F238E27FC236}">
-                <a16:creationId xmlns:a16="http://schemas.microsoft.com/office/drawing/2014/main" id="{67D8B6B2-122F-9BDA-CB6F-E2D58D5C022A}"/>
-              </a:ext>
-            </a:extLst>
-          </p:cNvPr>
-          <p:cNvPicPr>
-            <a:picLocks noChangeAspect="1"/>
-          </p:cNvPicPr>
-          <p:nvPr/>
-        </p:nvPicPr>
-        <p:blipFill>
-          <a:blip r:embed="rId4"/>
-          <a:stretch>
-            <a:fillRect/>
-          </a:stretch>
-        </p:blipFill>
-        <p:spPr>
-          <a:xfrm>
-            <a:off x="390174" y="1320599"/>
-            <a:ext cx="6152445" cy="1891953"/>
-          </a:xfrm>
-          <a:prstGeom prst="rect">
-            <a:avLst/>
-          </a:prstGeom>
-        </p:spPr>
-      </p:pic>
-    </p:spTree>
-    <p:extLst>
-      <p:ext uri="{BB962C8B-B14F-4D97-AF65-F5344CB8AC3E}">
-        <p14:creationId xmlns:p14="http://schemas.microsoft.com/office/powerpoint/2010/main" val="3431953712"/>
-      </p:ext>
-    </p:extLst>
-  </p:cSld>
-  <p:clrMapOvr>
-    <a:masterClrMapping/>
-  </p:clrMapOvr>
-</p:sld>
-</file>
-
-<file path=ppt/slides/slide13.xml><?xml version="1.0" encoding="utf-8"?>
 <p:sld xmlns:a="http://schemas.openxmlformats.org/drawingml/2006/main" xmlns:r="http://schemas.openxmlformats.org/officeDocument/2006/relationships" xmlns:p="http://schemas.openxmlformats.org/presentationml/2006/main">
   <p:cSld>
     <p:spTree>
@@ -7073,7 +6839,7 @@
           <a:p>
             <a:fld id="{9C5272DB-0103-AF4C-A22D-07421EC406AD}" type="datetime1">
               <a:rPr lang="en-IN" smtClean="0"/>
-              <a:t>10-03-2026</a:t>
+              <a:t>11-03-2026</a:t>
             </a:fld>
             <a:endParaRPr lang="en-US"/>
           </a:p>
@@ -7130,7 +6896,7 @@
           <a:p>
             <a:fld id="{B961B71F-4B40-8942-BB88-E0F5C0B46E10}" type="slidenum">
               <a:rPr lang="en-US" smtClean="0"/>
-              <a:t>13</a:t>
+              <a:t>12</a:t>
             </a:fld>
             <a:endParaRPr lang="en-US"/>
           </a:p>
@@ -7138,10 +6904,10 @@
       </p:sp>
       <p:pic>
         <p:nvPicPr>
-          <p:cNvPr id="8" name="Picture 7">
-            <a:extLst>
-              <a:ext uri="{FF2B5EF4-FFF2-40B4-BE49-F238E27FC236}">
-                <a16:creationId xmlns:a16="http://schemas.microsoft.com/office/drawing/2014/main" id="{D1A66999-F449-C09C-CC89-856BC524015D}"/>
+          <p:cNvPr id="15" name="Picture 14">
+            <a:extLst>
+              <a:ext uri="{FF2B5EF4-FFF2-40B4-BE49-F238E27FC236}">
+                <a16:creationId xmlns:a16="http://schemas.microsoft.com/office/drawing/2014/main" id="{9A391C00-B55B-3FED-3157-5071526C62F4}"/>
               </a:ext>
             </a:extLst>
           </p:cNvPr>
@@ -7158,8 +6924,8 @@
         </p:blipFill>
         <p:spPr>
           <a:xfrm>
-            <a:off x="6825053" y="2018945"/>
-            <a:ext cx="5262508" cy="1913916"/>
+            <a:off x="6811346" y="5103845"/>
+            <a:ext cx="4982547" cy="1116376"/>
           </a:xfrm>
           <a:prstGeom prst="rect">
             <a:avLst/>
@@ -7168,10 +6934,10 @@
       </p:pic>
       <p:pic>
         <p:nvPicPr>
-          <p:cNvPr id="9" name="Picture 8">
-            <a:extLst>
-              <a:ext uri="{FF2B5EF4-FFF2-40B4-BE49-F238E27FC236}">
-                <a16:creationId xmlns:a16="http://schemas.microsoft.com/office/drawing/2014/main" id="{EC617EE0-5BA5-6740-C1CD-EAFCB8050C08}"/>
+          <p:cNvPr id="17" name="Picture 16">
+            <a:extLst>
+              <a:ext uri="{FF2B5EF4-FFF2-40B4-BE49-F238E27FC236}">
+                <a16:creationId xmlns:a16="http://schemas.microsoft.com/office/drawing/2014/main" id="{D515F4DE-4055-D046-7638-A4648CCC98C0}"/>
               </a:ext>
             </a:extLst>
           </p:cNvPr>
@@ -7188,8 +6954,8 @@
         </p:blipFill>
         <p:spPr>
           <a:xfrm>
-            <a:off x="327379" y="3729173"/>
-            <a:ext cx="6141155" cy="2117604"/>
+            <a:off x="1296955" y="4535928"/>
+            <a:ext cx="5225143" cy="1752357"/>
           </a:xfrm>
           <a:prstGeom prst="rect">
             <a:avLst/>
@@ -7198,10 +6964,10 @@
       </p:pic>
       <p:pic>
         <p:nvPicPr>
-          <p:cNvPr id="10" name="Picture 9">
-            <a:extLst>
-              <a:ext uri="{FF2B5EF4-FFF2-40B4-BE49-F238E27FC236}">
-                <a16:creationId xmlns:a16="http://schemas.microsoft.com/office/drawing/2014/main" id="{17629C17-F0D6-F678-B341-9C9412B513E4}"/>
+          <p:cNvPr id="21" name="Picture 20">
+            <a:extLst>
+              <a:ext uri="{FF2B5EF4-FFF2-40B4-BE49-F238E27FC236}">
+                <a16:creationId xmlns:a16="http://schemas.microsoft.com/office/drawing/2014/main" id="{365F466F-E7BF-CBA4-69D7-DE432E85A015}"/>
               </a:ext>
             </a:extLst>
           </p:cNvPr>
@@ -7218,8 +6984,8 @@
         </p:blipFill>
         <p:spPr>
           <a:xfrm>
-            <a:off x="568203" y="1101996"/>
-            <a:ext cx="5330635" cy="2117604"/>
+            <a:off x="274297" y="1990610"/>
+            <a:ext cx="6126503" cy="1573684"/>
           </a:xfrm>
           <a:prstGeom prst="rect">
             <a:avLst/>
@@ -7228,10 +6994,10 @@
       </p:pic>
       <p:pic>
         <p:nvPicPr>
-          <p:cNvPr id="12" name="Picture 11">
-            <a:extLst>
-              <a:ext uri="{FF2B5EF4-FFF2-40B4-BE49-F238E27FC236}">
-                <a16:creationId xmlns:a16="http://schemas.microsoft.com/office/drawing/2014/main" id="{85F164E8-09E7-F69A-23F8-0929E7D74035}"/>
+          <p:cNvPr id="23" name="Picture 22">
+            <a:extLst>
+              <a:ext uri="{FF2B5EF4-FFF2-40B4-BE49-F238E27FC236}">
+                <a16:creationId xmlns:a16="http://schemas.microsoft.com/office/drawing/2014/main" id="{4A7FBD98-C64C-1817-CF49-152817FD53CD}"/>
               </a:ext>
             </a:extLst>
           </p:cNvPr>
@@ -7248,8 +7014,8 @@
         </p:blipFill>
         <p:spPr>
           <a:xfrm>
-            <a:off x="6931378" y="4442433"/>
-            <a:ext cx="4933243" cy="1905965"/>
+            <a:off x="6811346" y="1431470"/>
+            <a:ext cx="5176935" cy="2319436"/>
           </a:xfrm>
           <a:prstGeom prst="rect">
             <a:avLst/>
@@ -7260,6 +7026,240 @@
     <p:extLst>
       <p:ext uri="{BB962C8B-B14F-4D97-AF65-F5344CB8AC3E}">
         <p14:creationId xmlns:p14="http://schemas.microsoft.com/office/powerpoint/2010/main" val="410746738"/>
+      </p:ext>
+    </p:extLst>
+  </p:cSld>
+  <p:clrMapOvr>
+    <a:masterClrMapping/>
+  </p:clrMapOvr>
+</p:sld>
+</file>
+
+<file path=ppt/slides/slide13.xml><?xml version="1.0" encoding="utf-8"?>
+<p:sld xmlns:a="http://schemas.openxmlformats.org/drawingml/2006/main" xmlns:r="http://schemas.openxmlformats.org/officeDocument/2006/relationships" xmlns:p="http://schemas.openxmlformats.org/presentationml/2006/main">
+  <p:cSld>
+    <p:spTree>
+      <p:nvGrpSpPr>
+        <p:cNvPr id="1" name=""/>
+        <p:cNvGrpSpPr/>
+        <p:nvPr/>
+      </p:nvGrpSpPr>
+      <p:grpSpPr>
+        <a:xfrm>
+          <a:off x="0" y="0"/>
+          <a:ext cx="0" cy="0"/>
+          <a:chOff x="0" y="0"/>
+          <a:chExt cx="0" cy="0"/>
+        </a:xfrm>
+      </p:grpSpPr>
+      <p:sp>
+        <p:nvSpPr>
+          <p:cNvPr id="2" name="Title 1">
+            <a:extLst>
+              <a:ext uri="{FF2B5EF4-FFF2-40B4-BE49-F238E27FC236}">
+                <a16:creationId xmlns:a16="http://schemas.microsoft.com/office/drawing/2014/main" id="{37323D68-D41B-9825-3931-B79590C795F8}"/>
+              </a:ext>
+            </a:extLst>
+          </p:cNvPr>
+          <p:cNvSpPr>
+            <a:spLocks noGrp="1"/>
+          </p:cNvSpPr>
+          <p:nvPr>
+            <p:ph type="title"/>
+          </p:nvPr>
+        </p:nvSpPr>
+        <p:spPr/>
+        <p:txBody>
+          <a:bodyPr/>
+          <a:lstStyle/>
+          <a:p>
+            <a:r>
+              <a:rPr lang="en-US" dirty="0"/>
+              <a:t>Screenshots for FWD &amp; DSA</a:t>
+            </a:r>
+          </a:p>
+        </p:txBody>
+      </p:sp>
+      <p:sp>
+        <p:nvSpPr>
+          <p:cNvPr id="4" name="Date Placeholder 3">
+            <a:extLst>
+              <a:ext uri="{FF2B5EF4-FFF2-40B4-BE49-F238E27FC236}">
+                <a16:creationId xmlns:a16="http://schemas.microsoft.com/office/drawing/2014/main" id="{F1963D1B-E2DB-29C3-BA63-FF21B16E3D52}"/>
+              </a:ext>
+            </a:extLst>
+          </p:cNvPr>
+          <p:cNvSpPr>
+            <a:spLocks noGrp="1"/>
+          </p:cNvSpPr>
+          <p:nvPr>
+            <p:ph type="dt" sz="half" idx="10"/>
+          </p:nvPr>
+        </p:nvSpPr>
+        <p:spPr/>
+        <p:txBody>
+          <a:bodyPr/>
+          <a:lstStyle/>
+          <a:p>
+            <a:fld id="{9C5272DB-0103-AF4C-A22D-07421EC406AD}" type="datetime1">
+              <a:rPr lang="en-IN" smtClean="0"/>
+              <a:t>11-03-2026</a:t>
+            </a:fld>
+            <a:endParaRPr lang="en-US"/>
+          </a:p>
+        </p:txBody>
+      </p:sp>
+      <p:sp>
+        <p:nvSpPr>
+          <p:cNvPr id="5" name="Footer Placeholder 4">
+            <a:extLst>
+              <a:ext uri="{FF2B5EF4-FFF2-40B4-BE49-F238E27FC236}">
+                <a16:creationId xmlns:a16="http://schemas.microsoft.com/office/drawing/2014/main" id="{49114CB5-AB44-10F9-E8AF-4658C65956F4}"/>
+              </a:ext>
+            </a:extLst>
+          </p:cNvPr>
+          <p:cNvSpPr>
+            <a:spLocks noGrp="1"/>
+          </p:cNvSpPr>
+          <p:nvPr>
+            <p:ph type="ftr" sz="quarter" idx="11"/>
+          </p:nvPr>
+        </p:nvSpPr>
+        <p:spPr/>
+        <p:txBody>
+          <a:bodyPr/>
+          <a:lstStyle/>
+          <a:p>
+            <a:r>
+              <a:rPr lang="en-US" dirty="0"/>
+              <a:t>173030211           Department of CSE</a:t>
+            </a:r>
+          </a:p>
+        </p:txBody>
+      </p:sp>
+      <p:sp>
+        <p:nvSpPr>
+          <p:cNvPr id="6" name="Slide Number Placeholder 5">
+            <a:extLst>
+              <a:ext uri="{FF2B5EF4-FFF2-40B4-BE49-F238E27FC236}">
+                <a16:creationId xmlns:a16="http://schemas.microsoft.com/office/drawing/2014/main" id="{198D5113-7B1F-AF02-CDA9-5B3AB95BE716}"/>
+              </a:ext>
+            </a:extLst>
+          </p:cNvPr>
+          <p:cNvSpPr>
+            <a:spLocks noGrp="1"/>
+          </p:cNvSpPr>
+          <p:nvPr>
+            <p:ph type="sldNum" sz="quarter" idx="12"/>
+          </p:nvPr>
+        </p:nvSpPr>
+        <p:spPr/>
+        <p:txBody>
+          <a:bodyPr/>
+          <a:lstStyle/>
+          <a:p>
+            <a:fld id="{B961B71F-4B40-8942-BB88-E0F5C0B46E10}" type="slidenum">
+              <a:rPr lang="en-US" smtClean="0"/>
+              <a:t>13</a:t>
+            </a:fld>
+            <a:endParaRPr lang="en-US"/>
+          </a:p>
+        </p:txBody>
+      </p:sp>
+      <p:pic>
+        <p:nvPicPr>
+          <p:cNvPr id="7" name="Picture 6">
+            <a:extLst>
+              <a:ext uri="{FF2B5EF4-FFF2-40B4-BE49-F238E27FC236}">
+                <a16:creationId xmlns:a16="http://schemas.microsoft.com/office/drawing/2014/main" id="{C8E88848-14EB-5A1C-3127-94819B7E00AB}"/>
+              </a:ext>
+            </a:extLst>
+          </p:cNvPr>
+          <p:cNvPicPr>
+            <a:picLocks noChangeAspect="1"/>
+          </p:cNvPicPr>
+          <p:nvPr/>
+        </p:nvPicPr>
+        <p:blipFill>
+          <a:blip r:embed="rId2"/>
+          <a:stretch>
+            <a:fillRect/>
+          </a:stretch>
+        </p:blipFill>
+        <p:spPr>
+          <a:xfrm>
+            <a:off x="223934" y="1334278"/>
+            <a:ext cx="3620278" cy="2948474"/>
+          </a:xfrm>
+          <a:prstGeom prst="rect">
+            <a:avLst/>
+          </a:prstGeom>
+        </p:spPr>
+      </p:pic>
+      <p:pic>
+        <p:nvPicPr>
+          <p:cNvPr id="9" name="Picture 8">
+            <a:extLst>
+              <a:ext uri="{FF2B5EF4-FFF2-40B4-BE49-F238E27FC236}">
+                <a16:creationId xmlns:a16="http://schemas.microsoft.com/office/drawing/2014/main" id="{9889359B-51A5-21E6-A314-75040B396EFD}"/>
+              </a:ext>
+            </a:extLst>
+          </p:cNvPr>
+          <p:cNvPicPr>
+            <a:picLocks noChangeAspect="1"/>
+          </p:cNvPicPr>
+          <p:nvPr/>
+        </p:nvPicPr>
+        <p:blipFill>
+          <a:blip r:embed="rId3"/>
+          <a:stretch>
+            <a:fillRect/>
+          </a:stretch>
+        </p:blipFill>
+        <p:spPr>
+          <a:xfrm>
+            <a:off x="7893698" y="908178"/>
+            <a:ext cx="3953070" cy="1939229"/>
+          </a:xfrm>
+          <a:prstGeom prst="rect">
+            <a:avLst/>
+          </a:prstGeom>
+        </p:spPr>
+      </p:pic>
+      <p:pic>
+        <p:nvPicPr>
+          <p:cNvPr id="11" name="Picture 10">
+            <a:extLst>
+              <a:ext uri="{FF2B5EF4-FFF2-40B4-BE49-F238E27FC236}">
+                <a16:creationId xmlns:a16="http://schemas.microsoft.com/office/drawing/2014/main" id="{65658B90-D64E-FB8B-4010-E429D8B8B51E}"/>
+              </a:ext>
+            </a:extLst>
+          </p:cNvPr>
+          <p:cNvPicPr>
+            <a:picLocks noChangeAspect="1"/>
+          </p:cNvPicPr>
+          <p:nvPr/>
+        </p:nvPicPr>
+        <p:blipFill>
+          <a:blip r:embed="rId4"/>
+          <a:stretch>
+            <a:fillRect/>
+          </a:stretch>
+        </p:blipFill>
+        <p:spPr>
+          <a:xfrm>
+            <a:off x="4431247" y="2893291"/>
+            <a:ext cx="4311537" cy="3828184"/>
+          </a:xfrm>
+          <a:prstGeom prst="rect">
+            <a:avLst/>
+          </a:prstGeom>
+        </p:spPr>
+      </p:pic>
+    </p:spTree>
+    <p:extLst>
+      <p:ext uri="{BB962C8B-B14F-4D97-AF65-F5344CB8AC3E}">
+        <p14:creationId xmlns:p14="http://schemas.microsoft.com/office/powerpoint/2010/main" val="3431953712"/>
       </p:ext>
     </p:extLst>
   </p:cSld>
@@ -7436,7 +7436,7 @@
           <a:p>
             <a:fld id="{20A639D7-EAE1-7C4A-AC63-30DD6B16DE20}" type="datetime1">
               <a:rPr lang="en-IN" smtClean="0"/>
-              <a:t>10-03-2026</a:t>
+              <a:t>11-03-2026</a:t>
             </a:fld>
             <a:endParaRPr lang="en-US"/>
           </a:p>
@@ -7591,7 +7591,7 @@
           <a:p>
             <a:fld id="{9C5272DB-0103-AF4C-A22D-07421EC406AD}" type="datetime1">
               <a:rPr lang="en-IN" smtClean="0"/>
-              <a:t>10-03-2026</a:t>
+              <a:t>11-03-2026</a:t>
             </a:fld>
             <a:endParaRPr lang="en-US"/>
           </a:p>
@@ -7716,10 +7716,10 @@
       </p:pic>
       <p:pic>
         <p:nvPicPr>
-          <p:cNvPr id="16" name="Picture 15">
-            <a:extLst>
-              <a:ext uri="{FF2B5EF4-FFF2-40B4-BE49-F238E27FC236}">
-                <a16:creationId xmlns:a16="http://schemas.microsoft.com/office/drawing/2014/main" id="{74E4EE10-5364-2C09-11E4-9BC4E4BD2FDE}"/>
+          <p:cNvPr id="7" name="Picture 6">
+            <a:extLst>
+              <a:ext uri="{FF2B5EF4-FFF2-40B4-BE49-F238E27FC236}">
+                <a16:creationId xmlns:a16="http://schemas.microsoft.com/office/drawing/2014/main" id="{D6A34937-FAD2-2698-374B-C4E783693DA6}"/>
               </a:ext>
             </a:extLst>
           </p:cNvPr>
@@ -7729,15 +7729,15 @@
           <p:nvPr/>
         </p:nvPicPr>
         <p:blipFill>
-          <a:blip r:embed="rId2"/>
+          <a:blip r:embed="rId4"/>
           <a:stretch>
             <a:fillRect/>
           </a:stretch>
         </p:blipFill>
         <p:spPr>
           <a:xfrm>
-            <a:off x="1116321" y="1119895"/>
-            <a:ext cx="3275057" cy="5363545"/>
+            <a:off x="434340" y="992805"/>
+            <a:ext cx="4648200" cy="5363545"/>
           </a:xfrm>
           <a:prstGeom prst="rect">
             <a:avLst/>
@@ -7853,7 +7853,7 @@
           <a:p>
             <a:fld id="{7AAD6276-EBF6-BB4A-A6C6-114A8D55B891}" type="datetime1">
               <a:rPr lang="en-IN" smtClean="0"/>
-              <a:t>10-03-2026</a:t>
+              <a:t>11-03-2026</a:t>
             </a:fld>
             <a:endParaRPr lang="en-US"/>
           </a:p>
@@ -8068,13 +8068,8 @@
             </a:pPr>
             <a:r>
               <a:rPr lang="en-US" sz="11200" dirty="0"/>
-              <a:t>Section</a:t>
-            </a:r>
-            <a:r>
-              <a:rPr lang="en-US" sz="11200"/>
-              <a:t>: 10</a:t>
-            </a:r>
-            <a:endParaRPr lang="en-US" sz="11200" dirty="0"/>
+              <a:t>Section: 11</a:t>
+            </a:r>
           </a:p>
         </p:txBody>
       </p:sp>
@@ -8101,7 +8096,7 @@
           <a:p>
             <a:fld id="{D4ABCEED-36AB-D94A-B562-4D3E096B39D1}" type="datetime1">
               <a:rPr lang="en-IN" smtClean="0"/>
-              <a:t>10-03-2026</a:t>
+              <a:t>11-03-2026</a:t>
             </a:fld>
             <a:endParaRPr lang="en-US"/>
           </a:p>
@@ -8721,7 +8716,7 @@
           <a:p>
             <a:fld id="{5D381120-93CB-BF4D-9125-DC4781C9106A}" type="datetime1">
               <a:rPr lang="en-IN" smtClean="0"/>
-              <a:t>10-03-2026</a:t>
+              <a:t>11-03-2026</a:t>
             </a:fld>
             <a:endParaRPr lang="en-US"/>
           </a:p>
@@ -8873,7 +8868,7 @@
           <a:p>
             <a:fld id="{20A639D7-EAE1-7C4A-AC63-30DD6B16DE20}" type="datetime1">
               <a:rPr lang="en-IN" smtClean="0"/>
-              <a:t>10-03-2026</a:t>
+              <a:t>11-03-2026</a:t>
             </a:fld>
             <a:endParaRPr lang="en-US"/>
           </a:p>
@@ -9003,6 +8998,7 @@
           </a:bodyPr>
           <a:lstStyle/>
           <a:p>
+            <a:pPr algn="just"/>
             <a:r>
               <a:rPr lang="en-US" sz="1800" dirty="0"/>
               <a:t>Career Compass </a:t>
@@ -9017,7 +9013,7 @@
             </a:r>
           </a:p>
           <a:p>
-            <a:pPr marL="0" lvl="0" indent="0" eaLnBrk="0" fontAlgn="base" hangingPunct="0">
+            <a:pPr marL="0" lvl="0" indent="0" algn="just" eaLnBrk="0" fontAlgn="base" hangingPunct="0">
               <a:lnSpc>
                 <a:spcPct val="100000"/>
               </a:lnSpc>
@@ -9051,6 +9047,7 @@
             <a:endParaRPr lang="en-US" sz="1800" dirty="0"/>
           </a:p>
           <a:p>
+            <a:pPr algn="just"/>
             <a:r>
               <a:rPr lang="en-US" altLang="en-US" sz="1800" dirty="0">
                 <a:latin typeface="Arial" panose="020B0604020202020204" pitchFamily="34" charset="0"/>
@@ -9075,6 +9072,7 @@
             </a:r>
           </a:p>
           <a:p>
+            <a:pPr algn="just"/>
             <a:r>
               <a:rPr lang="en-US" sz="1800" dirty="0"/>
               <a:t>The RESUME Builder to help students create Professional resumes Easily and Provides English improvement modules vocabulary and </a:t>
@@ -9089,6 +9087,7 @@
             </a:r>
           </a:p>
           <a:p>
+            <a:pPr algn="just"/>
             <a:r>
               <a:rPr lang="en-US" sz="1800" dirty="0"/>
               <a:t> Supports Confidence </a:t>
@@ -9103,13 +9102,14 @@
             </a:r>
           </a:p>
           <a:p>
+            <a:pPr algn="just"/>
             <a:r>
               <a:rPr lang="en-US" sz="1800" dirty="0"/>
               <a:t>Overall, The platform motivates students and helps them make informed career decisions for the future..</a:t>
             </a:r>
           </a:p>
           <a:p>
-            <a:pPr eaLnBrk="0" fontAlgn="base" hangingPunct="0">
+            <a:pPr algn="just" eaLnBrk="0" fontAlgn="base" hangingPunct="0">
               <a:lnSpc>
                 <a:spcPct val="100000"/>
               </a:lnSpc>
@@ -9430,7 +9430,7 @@
         </p:nvSpPr>
         <p:spPr bwMode="auto">
           <a:xfrm>
-            <a:off x="1143000" y="1370200"/>
+            <a:off x="2520244" y="2373625"/>
             <a:ext cx="248786" cy="369332"/>
           </a:xfrm>
           <a:prstGeom prst="rect">
@@ -9786,7 +9786,7 @@
           <a:p>
             <a:fld id="{22CB9F02-6AB8-A348-9013-8FCBB8174821}" type="datetime1">
               <a:rPr lang="en-IN" smtClean="0"/>
-              <a:t>10-03-2026</a:t>
+              <a:t>11-03-2026</a:t>
             </a:fld>
             <a:endParaRPr lang="en-US"/>
           </a:p>
@@ -10067,7 +10067,7 @@
           <a:p>
             <a:fld id="{20A639D7-EAE1-7C4A-AC63-30DD6B16DE20}" type="datetime1">
               <a:rPr lang="en-IN" smtClean="0"/>
-              <a:t>10-03-2026</a:t>
+              <a:t>11-03-2026</a:t>
             </a:fld>
             <a:endParaRPr lang="en-US"/>
           </a:p>
@@ -10515,7 +10515,7 @@
           <a:p>
             <a:fld id="{20A639D7-EAE1-7C4A-AC63-30DD6B16DE20}" type="datetime1">
               <a:rPr lang="en-IN" smtClean="0"/>
-              <a:t>10-03-2026</a:t>
+              <a:t>11-03-2026</a:t>
             </a:fld>
             <a:endParaRPr lang="en-US"/>
           </a:p>
@@ -10788,7 +10788,7 @@
           <a:p>
             <a:fld id="{20A639D7-EAE1-7C4A-AC63-30DD6B16DE20}" type="datetime1">
               <a:rPr lang="en-IN" smtClean="0"/>
-              <a:t>10-03-2026</a:t>
+              <a:t>11-03-2026</a:t>
             </a:fld>
             <a:endParaRPr lang="en-US"/>
           </a:p>
@@ -10944,7 +10944,7 @@
           <a:p>
             <a:fld id="{20A639D7-EAE1-7C4A-AC63-30DD6B16DE20}" type="datetime1">
               <a:rPr lang="en-IN" smtClean="0"/>
-              <a:t>10-03-2026</a:t>
+              <a:t>11-03-2026</a:t>
             </a:fld>
             <a:endParaRPr lang="en-US"/>
           </a:p>
